--- a/簡報與文件/比賽簡報_升級版.pptx
+++ b/簡報與文件/比賽簡報_升級版.pptx
@@ -1658,7 +1658,7 @@
           <a:lstStyle/>
           <a:p>
             <a:r>
-              <a:t>⏱25s｜四家金控全公開資料，最能凸顯「沒法並排比」的痛點。1,259 個結構化指標、846 段語意段落。簡報用 AI 看圖抽數字，法說會錄音自己轉逐字稿——這批逐字稿獨家有、平台沒有。</a:t>
+              <a:t>⏱25s｜三家金控全公開資料，最能凸顯「沒法並排比」的痛點。1,331 個結構化指標、947 段語意段落。簡報用 AI 看圖抽數字，法說會錄音自己轉逐字稿——這批逐字稿獨家有、平台沒有。</a:t>
             </a:r>
           </a:p>
         </p:txBody>
@@ -19109,7 +19109,7 @@
                 <a:ea typeface="Microsoft JhengHei"/>
                 <a:cs typeface="Microsoft JhengHei"/>
               </a:rPr>
-              <a:t>✓ 四家金控、1,259 指標、846 段落，全公開可查</a:t>
+              <a:t>✓ 三家金控、1,331 指標、947 段落，全公開可查</a:t>
             </a:r>
           </a:p>
         </p:txBody>
@@ -19814,7 +19814,7 @@
                 <a:ea typeface="Microsoft JhengHei"/>
                 <a:cs typeface="Microsoft JhengHei"/>
               </a:rPr>
-              <a:t>4</a:t>
+              <a:t>3</a:t>
             </a:r>
           </a:p>
         </p:txBody>
@@ -20190,7 +20190,7 @@
                 <a:ea typeface="Microsoft JhengHei"/>
                 <a:cs typeface="Microsoft JhengHei"/>
               </a:rPr>
-              <a:t>1,259</a:t>
+              <a:t>1,331</a:t>
             </a:r>
           </a:p>
         </p:txBody>
@@ -20378,7 +20378,7 @@
                 <a:ea typeface="Microsoft JhengHei"/>
                 <a:cs typeface="Microsoft JhengHei"/>
               </a:rPr>
-              <a:t>846</a:t>
+              <a:t>947</a:t>
             </a:r>
           </a:p>
         </p:txBody>
@@ -20472,7 +20472,7 @@
                 <a:ea typeface="Microsoft JhengHei"/>
                 <a:cs typeface="Microsoft JhengHei"/>
               </a:rPr>
-              <a:t>中信 · 國泰 · 玉山 · 第一金控——皆公開資料，最能凸顯「難以並排比較」的痛點；第一金控與三家 2025 年報均為上線後上傳新增，可持續擴充。</a:t>
+              <a:t>中信 · 國泰 · 玉山——皆公開資料，最能凸顯「難以並排比較」的痛點；三家 2025 年報與 2025 各季財報均為上線後上傳新增，可持續擴充。</a:t>
             </a:r>
           </a:p>
         </p:txBody>
@@ -22345,7 +22345,7 @@
                 </a:solidFill>
                 <a:latin typeface="Noto Sans TC"/>
               </a:rPr>
-              <a:t>✓ 1,259 個唯一節點＋維度關聯，跨期不再答錯</a:t>
+              <a:t>✓ 1,331 個唯一節點＋維度關聯，跨期不再答錯</a:t>
             </a:r>
           </a:p>
         </p:txBody>
